--- a/_bench/dist/bench-combined.pptx
+++ b/_bench/dist/bench-combined.pptx
@@ -3574,45 +3574,52 @@
       </p:sp>
       <p:sp>
         <p:nvSpPr>
-          <p:cNvPr id="9" name="TextBox 8"/>
-          <p:cNvSpPr txBox="1"/>
+          <p:cNvPr id="9" name="Rounded Rectangle 8"/>
+          <p:cNvSpPr/>
           <p:nvPr/>
         </p:nvSpPr>
         <p:spPr>
           <a:xfrm>
             <a:off x="762000" y="5419725"/>
-            <a:ext cx="1141800" cy="457200"/>
-          </a:xfrm>
-          <a:prstGeom prst="rect">
+            <a:ext cx="1325612" cy="457200"/>
+          </a:xfrm>
+          <a:prstGeom prst="roundRect">
             <a:avLst/>
           </a:prstGeom>
           <a:solidFill>
             <a:srgbClr val="A78BFA"/>
           </a:solidFill>
-        </p:spPr>
-        <p:txBody>
-          <a:bodyPr wrap="square" lIns="0" rIns="0" tIns="0" bIns="0">
-            <a:spAutoFit/>
-          </a:bodyPr>
-          <a:lstStyle/>
-          <a:p>
-            <a:pPr algn="ctr"/>
-            <a:r>
-              <a:rPr sz="1125" b="1" i="0" u="none">
-                <a:solidFill>
-                  <a:srgbClr val="0A0A0F"/>
-                </a:solidFill>
-                <a:latin typeface="Inter"/>
-              </a:rPr>
-              <a:t>Get the CLI →</a:t>
-            </a:r>
-          </a:p>
-        </p:txBody>
-      </p:sp>
-      <p:sp>
-        <p:nvSpPr>
-          <p:cNvPr id="10" name="TextBox 9"/>
-          <p:cNvSpPr txBox="1"/>
+          <a:ln>
+            <a:noFill/>
+          </a:ln>
+        </p:spPr>
+        <p:style>
+          <a:lnRef idx="1">
+            <a:schemeClr val="accent1"/>
+          </a:lnRef>
+          <a:fillRef idx="3">
+            <a:schemeClr val="accent1"/>
+          </a:fillRef>
+          <a:effectRef idx="2">
+            <a:schemeClr val="accent1"/>
+          </a:effectRef>
+          <a:fontRef idx="minor">
+            <a:schemeClr val="lt1"/>
+          </a:fontRef>
+        </p:style>
+        <p:txBody>
+          <a:bodyPr rtlCol="0" anchor="ctr"/>
+          <a:lstStyle/>
+          <a:p>
+            <a:pPr algn="ctr"/>
+            <a:endParaRPr lang="en-US"/>
+          </a:p>
+        </p:txBody>
+      </p:sp>
+      <p:sp>
+        <p:nvSpPr>
+          <p:cNvPr id="10" name="Rounded Rectangle 9"/>
+          <p:cNvSpPr/>
           <p:nvPr/>
         </p:nvSpPr>
         <p:spPr>
@@ -3620,27 +3627,36 @@
             <a:off x="2201912" y="5419725"/>
             <a:ext cx="1498253" cy="457200"/>
           </a:xfrm>
-          <a:prstGeom prst="rect">
-            <a:avLst/>
-          </a:prstGeom>
-          <a:noFill/>
-        </p:spPr>
-        <p:txBody>
-          <a:bodyPr wrap="square" lIns="0" rIns="0" tIns="0" bIns="0">
-            <a:spAutoFit/>
-          </a:bodyPr>
-          <a:lstStyle/>
-          <a:p>
-            <a:pPr algn="ctr"/>
-            <a:r>
-              <a:rPr sz="1125" b="1" i="0" u="none">
-                <a:solidFill>
-                  <a:srgbClr val="F5F5F7"/>
-                </a:solidFill>
-                <a:latin typeface="Inter"/>
-              </a:rPr>
-              <a:t>Watch the demo</a:t>
-            </a:r>
+          <a:prstGeom prst="roundRect">
+            <a:avLst/>
+          </a:prstGeom>
+          <a:noFill/>
+          <a:ln w="9525">
+            <a:solidFill>
+              <a:srgbClr val="FFFFFF"/>
+            </a:solidFill>
+          </a:ln>
+        </p:spPr>
+        <p:style>
+          <a:lnRef idx="1">
+            <a:schemeClr val="accent1"/>
+          </a:lnRef>
+          <a:fillRef idx="3">
+            <a:schemeClr val="accent1"/>
+          </a:fillRef>
+          <a:effectRef idx="2">
+            <a:schemeClr val="accent1"/>
+          </a:effectRef>
+          <a:fontRef idx="minor">
+            <a:schemeClr val="lt1"/>
+          </a:fontRef>
+        </p:style>
+        <p:txBody>
+          <a:bodyPr rtlCol="0" anchor="ctr"/>
+          <a:lstStyle/>
+          <a:p>
+            <a:pPr algn="ctr"/>
+            <a:endParaRPr lang="en-US"/>
           </a:p>
         </p:txBody>
       </p:sp>
@@ -3937,16 +3953,16 @@
       </p:sp>
       <p:sp>
         <p:nvSpPr>
-          <p:cNvPr id="6" name="TextBox 5"/>
-          <p:cNvSpPr txBox="1"/>
+          <p:cNvPr id="6" name="Rounded Rectangle 5"/>
+          <p:cNvSpPr/>
           <p:nvPr/>
         </p:nvSpPr>
         <p:spPr>
           <a:xfrm>
             <a:off x="3818483" y="4457700"/>
-            <a:ext cx="2520739" cy="457200"/>
-          </a:xfrm>
-          <a:prstGeom prst="rect">
+            <a:ext cx="2900511" cy="457200"/>
+          </a:xfrm>
+          <a:prstGeom prst="roundRect">
             <a:avLst/>
           </a:prstGeom>
           <a:solidFill>
@@ -3954,60 +3970,74 @@
               <a:alpha val="6000"/>
             </a:srgbClr>
           </a:solidFill>
-        </p:spPr>
-        <p:txBody>
-          <a:bodyPr wrap="square" lIns="0" rIns="0" tIns="0" bIns="0">
-            <a:spAutoFit/>
-          </a:bodyPr>
-          <a:lstStyle/>
-          <a:p>
-            <a:pPr algn="ctr"/>
-            <a:r>
-              <a:rPr sz="1125" b="1" i="0" u="none">
-                <a:solidFill>
-                  <a:srgbClr val="F5F5F7"/>
-                </a:solidFill>
-                <a:latin typeface="Inter"/>
-              </a:rPr>
-              <a:t>curl -fsSL https://slidify.sh/install | sh</a:t>
-            </a:r>
-          </a:p>
-        </p:txBody>
-      </p:sp>
-      <p:sp>
-        <p:nvSpPr>
-          <p:cNvPr id="7" name="TextBox 6"/>
-          <p:cNvSpPr txBox="1"/>
+          <a:ln>
+            <a:noFill/>
+          </a:ln>
+        </p:spPr>
+        <p:style>
+          <a:lnRef idx="1">
+            <a:schemeClr val="accent1"/>
+          </a:lnRef>
+          <a:fillRef idx="3">
+            <a:schemeClr val="accent1"/>
+          </a:fillRef>
+          <a:effectRef idx="2">
+            <a:schemeClr val="accent1"/>
+          </a:effectRef>
+          <a:fontRef idx="minor">
+            <a:schemeClr val="lt1"/>
+          </a:fontRef>
+        </p:style>
+        <p:txBody>
+          <a:bodyPr rtlCol="0" anchor="ctr"/>
+          <a:lstStyle/>
+          <a:p>
+            <a:pPr algn="ctr"/>
+            <a:endParaRPr lang="en-US"/>
+          </a:p>
+        </p:txBody>
+      </p:sp>
+      <p:sp>
+        <p:nvSpPr>
+          <p:cNvPr id="7" name="Rounded Rectangle 6"/>
+          <p:cNvSpPr/>
           <p:nvPr/>
         </p:nvSpPr>
         <p:spPr>
           <a:xfrm>
             <a:off x="6833295" y="4457700"/>
-            <a:ext cx="1332533" cy="457200"/>
-          </a:xfrm>
-          <a:prstGeom prst="rect">
+            <a:ext cx="1540222" cy="457200"/>
+          </a:xfrm>
+          <a:prstGeom prst="roundRect">
             <a:avLst/>
           </a:prstGeom>
           <a:solidFill>
             <a:srgbClr val="A78BFA"/>
           </a:solidFill>
-        </p:spPr>
-        <p:txBody>
-          <a:bodyPr wrap="square" lIns="0" rIns="0" tIns="0" bIns="0">
-            <a:spAutoFit/>
-          </a:bodyPr>
-          <a:lstStyle/>
-          <a:p>
-            <a:pPr algn="ctr"/>
-            <a:r>
-              <a:rPr sz="1125" b="1" i="0" u="none">
-                <a:solidFill>
-                  <a:srgbClr val="0A0A0F"/>
-                </a:solidFill>
-                <a:latin typeface="Inter"/>
-              </a:rPr>
-              <a:t>Read the docs →</a:t>
-            </a:r>
+          <a:ln>
+            <a:noFill/>
+          </a:ln>
+        </p:spPr>
+        <p:style>
+          <a:lnRef idx="1">
+            <a:schemeClr val="accent1"/>
+          </a:lnRef>
+          <a:fillRef idx="3">
+            <a:schemeClr val="accent1"/>
+          </a:fillRef>
+          <a:effectRef idx="2">
+            <a:schemeClr val="accent1"/>
+          </a:effectRef>
+          <a:fontRef idx="minor">
+            <a:schemeClr val="lt1"/>
+          </a:fontRef>
+        </p:style>
+        <p:txBody>
+          <a:bodyPr rtlCol="0" anchor="ctr"/>
+          <a:lstStyle/>
+          <a:p>
+            <a:pPr algn="ctr"/>
+            <a:endParaRPr lang="en-US"/>
           </a:p>
         </p:txBody>
       </p:sp>
@@ -21121,7 +21151,49 @@
       </p:sp>
       <p:sp>
         <p:nvSpPr>
-          <p:cNvPr id="21" name="TextBox 20"/>
+          <p:cNvPr id="21" name="Rectangle 20"/>
+          <p:cNvSpPr/>
+          <p:nvPr/>
+        </p:nvSpPr>
+        <p:spPr>
+          <a:xfrm>
+            <a:off x="762000" y="4533900"/>
+            <a:ext cx="10668000" cy="9525"/>
+          </a:xfrm>
+          <a:prstGeom prst="rect">
+            <a:avLst/>
+          </a:prstGeom>
+          <a:noFill/>
+          <a:ln>
+            <a:noFill/>
+          </a:ln>
+        </p:spPr>
+        <p:style>
+          <a:lnRef idx="1">
+            <a:schemeClr val="accent1"/>
+          </a:lnRef>
+          <a:fillRef idx="3">
+            <a:schemeClr val="accent1"/>
+          </a:fillRef>
+          <a:effectRef idx="2">
+            <a:schemeClr val="accent1"/>
+          </a:effectRef>
+          <a:fontRef idx="minor">
+            <a:schemeClr val="lt1"/>
+          </a:fontRef>
+        </p:style>
+        <p:txBody>
+          <a:bodyPr rtlCol="0" anchor="ctr"/>
+          <a:lstStyle/>
+          <a:p>
+            <a:pPr algn="ctr"/>
+            <a:endParaRPr lang="en-US"/>
+          </a:p>
+        </p:txBody>
+      </p:sp>
+      <p:sp>
+        <p:nvSpPr>
+          <p:cNvPr id="22" name="TextBox 21"/>
           <p:cNvSpPr txBox="1"/>
           <p:nvPr/>
         </p:nvSpPr>
@@ -34338,7 +34410,49 @@
       </p:sp>
       <p:sp>
         <p:nvSpPr>
-          <p:cNvPr id="166" name="TextBox 165"/>
+          <p:cNvPr id="166" name="Rectangle 165"/>
+          <p:cNvSpPr/>
+          <p:nvPr/>
+        </p:nvSpPr>
+        <p:spPr>
+          <a:xfrm>
+            <a:off x="895350" y="5476875"/>
+            <a:ext cx="457200" cy="9525"/>
+          </a:xfrm>
+          <a:prstGeom prst="rect">
+            <a:avLst/>
+          </a:prstGeom>
+          <a:noFill/>
+          <a:ln>
+            <a:noFill/>
+          </a:ln>
+        </p:spPr>
+        <p:style>
+          <a:lnRef idx="1">
+            <a:schemeClr val="accent1"/>
+          </a:lnRef>
+          <a:fillRef idx="3">
+            <a:schemeClr val="accent1"/>
+          </a:fillRef>
+          <a:effectRef idx="2">
+            <a:schemeClr val="accent1"/>
+          </a:effectRef>
+          <a:fontRef idx="minor">
+            <a:schemeClr val="lt1"/>
+          </a:fontRef>
+        </p:style>
+        <p:txBody>
+          <a:bodyPr rtlCol="0" anchor="ctr"/>
+          <a:lstStyle/>
+          <a:p>
+            <a:pPr algn="ctr"/>
+            <a:endParaRPr lang="en-US"/>
+          </a:p>
+        </p:txBody>
+      </p:sp>
+      <p:sp>
+        <p:nvSpPr>
+          <p:cNvPr id="167" name="TextBox 166"/>
           <p:cNvSpPr txBox="1"/>
           <p:nvPr/>
         </p:nvSpPr>
@@ -34373,7 +34487,7 @@
       </p:sp>
       <p:sp>
         <p:nvSpPr>
-          <p:cNvPr id="167" name="TextBox 166"/>
+          <p:cNvPr id="168" name="TextBox 167"/>
           <p:cNvSpPr txBox="1"/>
           <p:nvPr/>
         </p:nvSpPr>
@@ -34408,7 +34522,7 @@
       </p:sp>
       <p:sp>
         <p:nvSpPr>
-          <p:cNvPr id="168" name="TextBox 167"/>
+          <p:cNvPr id="169" name="TextBox 168"/>
           <p:cNvSpPr txBox="1"/>
           <p:nvPr/>
         </p:nvSpPr>
@@ -34443,7 +34557,7 @@
       </p:sp>
       <p:sp>
         <p:nvSpPr>
-          <p:cNvPr id="169" name="TextBox 168"/>
+          <p:cNvPr id="170" name="TextBox 169"/>
           <p:cNvSpPr txBox="1"/>
           <p:nvPr/>
         </p:nvSpPr>
@@ -46396,7 +46510,49 @@
       </p:sp>
       <p:sp>
         <p:nvSpPr>
-          <p:cNvPr id="208" name="TextBox 207"/>
+          <p:cNvPr id="208" name="Rectangle 207"/>
+          <p:cNvSpPr/>
+          <p:nvPr/>
+        </p:nvSpPr>
+        <p:spPr>
+          <a:xfrm>
+            <a:off x="895350" y="5476875"/>
+            <a:ext cx="457200" cy="9525"/>
+          </a:xfrm>
+          <a:prstGeom prst="rect">
+            <a:avLst/>
+          </a:prstGeom>
+          <a:noFill/>
+          <a:ln>
+            <a:noFill/>
+          </a:ln>
+        </p:spPr>
+        <p:style>
+          <a:lnRef idx="1">
+            <a:schemeClr val="accent1"/>
+          </a:lnRef>
+          <a:fillRef idx="3">
+            <a:schemeClr val="accent1"/>
+          </a:fillRef>
+          <a:effectRef idx="2">
+            <a:schemeClr val="accent1"/>
+          </a:effectRef>
+          <a:fontRef idx="minor">
+            <a:schemeClr val="lt1"/>
+          </a:fontRef>
+        </p:style>
+        <p:txBody>
+          <a:bodyPr rtlCol="0" anchor="ctr"/>
+          <a:lstStyle/>
+          <a:p>
+            <a:pPr algn="ctr"/>
+            <a:endParaRPr lang="en-US"/>
+          </a:p>
+        </p:txBody>
+      </p:sp>
+      <p:sp>
+        <p:nvSpPr>
+          <p:cNvPr id="209" name="TextBox 208"/>
           <p:cNvSpPr txBox="1"/>
           <p:nvPr/>
         </p:nvSpPr>
@@ -46431,7 +46587,7 @@
       </p:sp>
       <p:sp>
         <p:nvSpPr>
-          <p:cNvPr id="209" name="TextBox 208"/>
+          <p:cNvPr id="210" name="TextBox 209"/>
           <p:cNvSpPr txBox="1"/>
           <p:nvPr/>
         </p:nvSpPr>
@@ -46466,7 +46622,7 @@
       </p:sp>
       <p:sp>
         <p:nvSpPr>
-          <p:cNvPr id="210" name="TextBox 209"/>
+          <p:cNvPr id="211" name="TextBox 210"/>
           <p:cNvSpPr txBox="1"/>
           <p:nvPr/>
         </p:nvSpPr>
@@ -46501,7 +46657,7 @@
       </p:sp>
       <p:sp>
         <p:nvSpPr>
-          <p:cNvPr id="211" name="TextBox 210"/>
+          <p:cNvPr id="212" name="TextBox 211"/>
           <p:cNvSpPr txBox="1"/>
           <p:nvPr/>
         </p:nvSpPr>
@@ -51210,8 +51366,8 @@
       </p:sp>
       <p:sp>
         <p:nvSpPr>
-          <p:cNvPr id="13" name="TextBox 12"/>
-          <p:cNvSpPr txBox="1"/>
+          <p:cNvPr id="13" name="Rounded Rectangle 12"/>
+          <p:cNvSpPr/>
           <p:nvPr/>
         </p:nvSpPr>
         <p:spPr>
@@ -51219,27 +51375,36 @@
             <a:off x="1076325" y="4924425"/>
             <a:ext cx="1264741" cy="381000"/>
           </a:xfrm>
-          <a:prstGeom prst="rect">
-            <a:avLst/>
-          </a:prstGeom>
-          <a:noFill/>
-        </p:spPr>
-        <p:txBody>
-          <a:bodyPr wrap="square" lIns="0" rIns="0" tIns="0" bIns="0">
-            <a:spAutoFit/>
-          </a:bodyPr>
-          <a:lstStyle/>
-          <a:p>
-            <a:pPr algn="ctr"/>
-            <a:r>
-              <a:rPr sz="1050" b="1" i="0" u="none">
-                <a:solidFill>
-                  <a:srgbClr val="F5F5F7"/>
-                </a:solidFill>
-                <a:latin typeface="Inter"/>
-              </a:rPr>
-              <a:t>Choose Hobby</a:t>
-            </a:r>
+          <a:prstGeom prst="roundRect">
+            <a:avLst/>
+          </a:prstGeom>
+          <a:noFill/>
+          <a:ln w="9525">
+            <a:solidFill>
+              <a:srgbClr val="FFFFFF"/>
+            </a:solidFill>
+          </a:ln>
+        </p:spPr>
+        <p:style>
+          <a:lnRef idx="1">
+            <a:schemeClr val="accent1"/>
+          </a:lnRef>
+          <a:fillRef idx="3">
+            <a:schemeClr val="accent1"/>
+          </a:fillRef>
+          <a:effectRef idx="2">
+            <a:schemeClr val="accent1"/>
+          </a:effectRef>
+          <a:fontRef idx="minor">
+            <a:schemeClr val="lt1"/>
+          </a:fontRef>
+        </p:style>
+        <p:txBody>
+          <a:bodyPr rtlCol="0" anchor="ctr"/>
+          <a:lstStyle/>
+          <a:p>
+            <a:pPr algn="ctr"/>
+            <a:endParaRPr lang="en-US"/>
           </a:p>
         </p:txBody>
       </p:sp>
@@ -56421,38 +56586,45 @@
       </p:sp>
       <p:sp>
         <p:nvSpPr>
-          <p:cNvPr id="30" name="TextBox 29"/>
-          <p:cNvSpPr txBox="1"/>
+          <p:cNvPr id="30" name="Rounded Rectangle 29"/>
+          <p:cNvSpPr/>
           <p:nvPr/>
         </p:nvSpPr>
         <p:spPr>
           <a:xfrm>
             <a:off x="9954518" y="4181475"/>
-            <a:ext cx="1303213" cy="381000"/>
-          </a:xfrm>
-          <a:prstGeom prst="rect">
+            <a:ext cx="1475482" cy="381000"/>
+          </a:xfrm>
+          <a:prstGeom prst="roundRect">
             <a:avLst/>
           </a:prstGeom>
           <a:solidFill>
             <a:srgbClr val="A78BFA"/>
           </a:solidFill>
-        </p:spPr>
-        <p:txBody>
-          <a:bodyPr wrap="square" lIns="0" rIns="0" tIns="0" bIns="0">
-            <a:spAutoFit/>
-          </a:bodyPr>
-          <a:lstStyle/>
-          <a:p>
-            <a:pPr algn="ctr"/>
-            <a:r>
-              <a:rPr sz="1050" b="1" i="0" u="none">
-                <a:solidFill>
-                  <a:srgbClr val="0A0A0F"/>
-                </a:solidFill>
-                <a:latin typeface="Inter"/>
-              </a:rPr>
-              <a:t>Join the waitlist →</a:t>
-            </a:r>
+          <a:ln>
+            <a:noFill/>
+          </a:ln>
+        </p:spPr>
+        <p:style>
+          <a:lnRef idx="1">
+            <a:schemeClr val="accent1"/>
+          </a:lnRef>
+          <a:fillRef idx="3">
+            <a:schemeClr val="accent1"/>
+          </a:fillRef>
+          <a:effectRef idx="2">
+            <a:schemeClr val="accent1"/>
+          </a:effectRef>
+          <a:fontRef idx="minor">
+            <a:schemeClr val="lt1"/>
+          </a:fontRef>
+        </p:style>
+        <p:txBody>
+          <a:bodyPr rtlCol="0" anchor="ctr"/>
+          <a:lstStyle/>
+          <a:p>
+            <a:pPr algn="ctr"/>
+            <a:endParaRPr lang="en-US"/>
           </a:p>
         </p:txBody>
       </p:sp>

--- a/_bench/dist/bench-combined.pptx
+++ b/_bench/dist/bench-combined.pptx
@@ -17630,7 +17630,7 @@
                 <a:solidFill>
                   <a:srgbClr val="0A0A0A"/>
                 </a:solidFill>
-                <a:latin typeface="Bebas Neue"/>
+                <a:latin typeface="Impact"/>
               </a:rPr>
               <a:t>PITCH</a:t>
             </a:r>
@@ -17665,7 +17665,7 @@
                 <a:solidFill>
                   <a:srgbClr val="0A0A0A"/>
                 </a:solidFill>
-                <a:latin typeface="Playfair Display"/>
+                <a:latin typeface="Cambria"/>
               </a:rPr>
               <a:t>Issue No. 04 · Spring 2026 · $14</a:t>
             </a:r>
@@ -17700,7 +17700,7 @@
                 <a:solidFill>
                   <a:srgbClr val="0A0A0A"/>
                 </a:solidFill>
-                <a:latin typeface="Playfair Display"/>
+                <a:latin typeface="Cambria"/>
               </a:rPr>
               <a:t>The cover story · pp. 24 — 31</a:t>
             </a:r>
@@ -17735,7 +17735,7 @@
                 <a:solidFill>
                   <a:srgbClr val="0A0A0A"/>
                 </a:solidFill>
-                <a:latin typeface="Bebas Neue"/>
+                <a:latin typeface="Impact"/>
               </a:rPr>
               <a:t>A FIELD GUIDE TO THE PAGE.</a:t>
             </a:r>
@@ -17772,7 +17772,7 @@
                 <a:solidFill>
                   <a:srgbClr val="E11D48"/>
                 </a:solidFill>
-                <a:latin typeface="Bebas Neue"/>
+                <a:latin typeface="Impact"/>
               </a:rPr>
               <a:t>EDITED</a:t>
             </a:r>
@@ -17807,7 +17807,7 @@
                 <a:solidFill>
                   <a:srgbClr val="0A0A0A"/>
                 </a:solidFill>
-                <a:latin typeface="Playfair Display"/>
+                <a:latin typeface="Cambria"/>
               </a:rPr>
               <a:t>By the editors</a:t>
             </a:r>
@@ -17842,7 +17842,7 @@
                 <a:solidFill>
                   <a:srgbClr val="0A0A0A"/>
                 </a:solidFill>
-                <a:latin typeface="Playfair Display"/>
+                <a:latin typeface="Cambria"/>
               </a:rPr>
               <a:t>a quiet revolution</a:t>
             </a:r>
@@ -18055,7 +18055,7 @@
                 <a:solidFill>
                   <a:srgbClr val="FFFFFF"/>
                 </a:solidFill>
-                <a:latin typeface="Bebas Neue"/>
+                <a:latin typeface="Impact"/>
               </a:rPr>
               <a:t>A NEW</a:t>
             </a:r>
@@ -18067,7 +18067,7 @@
                 <a:solidFill>
                   <a:srgbClr val="FFFFFF"/>
                 </a:solidFill>
-                <a:latin typeface="Bebas Neue"/>
+                <a:latin typeface="Impact"/>
               </a:rPr>
               <a:t>EDITORIAL ENGINE</a:t>
             </a:r>
@@ -18144,7 +18144,7 @@
                 <a:solidFill>
                   <a:srgbClr val="0A0A0A"/>
                 </a:solidFill>
-                <a:latin typeface="Bebas Neue"/>
+                <a:latin typeface="Impact"/>
               </a:rPr>
               <a:t>PP / 04</a:t>
             </a:r>
@@ -18179,7 +18179,7 @@
                 <a:solidFill>
                   <a:srgbClr val="0A0A0A"/>
                 </a:solidFill>
-                <a:latin typeface="Playfair Display"/>
+                <a:latin typeface="Cambria"/>
               </a:rPr>
               <a:t xml:space="preserve">Inside — how slidify rewrote the rules of editable presentations,
           why every shape matters, and the case for typographic restraint.</a:t>
@@ -18365,7 +18365,7 @@
                 <a:solidFill>
                   <a:srgbClr val="FFFFFF"/>
                 </a:solidFill>
-                <a:latin typeface="Playfair Display"/>
+                <a:latin typeface="Cambria"/>
               </a:rPr>
               <a:t>Photograph by — Studio Anonymous</a:t>
             </a:r>
@@ -18400,7 +18400,7 @@
                 <a:solidFill>
                   <a:srgbClr val="FFFFFF"/>
                 </a:solidFill>
-                <a:latin typeface="Bebas Neue"/>
+                <a:latin typeface="Impact"/>
               </a:rPr>
               <a:t>EDITORIAL</a:t>
             </a:r>
@@ -18412,7 +18412,7 @@
                 <a:solidFill>
                   <a:srgbClr val="FFFFFF"/>
                 </a:solidFill>
-                <a:latin typeface="Bebas Neue"/>
+                <a:latin typeface="Impact"/>
               </a:rPr>
               <a:t>FEATURE</a:t>
             </a:r>
@@ -18491,7 +18491,7 @@
                 <a:solidFill>
                   <a:srgbClr val="E11D48"/>
                 </a:solidFill>
-                <a:latin typeface="Playfair Display"/>
+                <a:latin typeface="Cambria"/>
               </a:rPr>
               <a:t>Pages 24 — 31</a:t>
             </a:r>
@@ -18526,7 +18526,7 @@
                 <a:solidFill>
                   <a:srgbClr val="0A0A0A"/>
                 </a:solidFill>
-                <a:latin typeface="Bebas Neue"/>
+                <a:latin typeface="Impact"/>
               </a:rPr>
               <a:t>A QUIET REVOLUTION</a:t>
             </a:r>
@@ -18538,7 +18538,7 @@
                 <a:solidFill>
                   <a:srgbClr val="0A0A0A"/>
                 </a:solidFill>
-                <a:latin typeface="Bebas Neue"/>
+                <a:latin typeface="Impact"/>
               </a:rPr>
               <a:t>IN PRESENTATION</a:t>
             </a:r>
@@ -18617,7 +18617,7 @@
                 <a:solidFill>
                   <a:srgbClr val="E11D48"/>
                 </a:solidFill>
-                <a:latin typeface="Bebas Neue"/>
+                <a:latin typeface="Impact"/>
               </a:rPr>
               <a:t>F</a:t>
             </a:r>
@@ -18652,7 +18652,7 @@
                 <a:solidFill>
                   <a:srgbClr val="E11D48"/>
                 </a:solidFill>
-                <a:latin typeface="Bebas Neue"/>
+                <a:latin typeface="Impact"/>
               </a:rPr>
               <a:t>F</a:t>
             </a:r>
@@ -18687,7 +18687,7 @@
                 <a:solidFill>
                   <a:srgbClr val="0A0A0A"/>
                 </a:solidFill>
-                <a:latin typeface="Playfair Display"/>
+                <a:latin typeface="Cambria"/>
               </a:rPr>
               <a:t>A. KAPLAN</a:t>
             </a:r>
@@ -18722,7 +18722,7 @@
                 <a:solidFill>
                   <a:srgbClr val="3F3F46"/>
                 </a:solidFill>
-                <a:latin typeface="Playfair Display"/>
+                <a:latin typeface="Cambria"/>
               </a:rPr>
               <a:t>4,200 words</a:t>
             </a:r>
@@ -18757,7 +18757,7 @@
                 <a:solidFill>
                   <a:srgbClr val="3F3F46"/>
                 </a:solidFill>
-                <a:latin typeface="Playfair Display"/>
+                <a:latin typeface="Cambria"/>
               </a:rPr>
               <a:t>continued page 28</a:t>
             </a:r>
@@ -18854,7 +18854,7 @@
                 <a:solidFill>
                   <a:srgbClr val="0A0A0A"/>
                 </a:solidFill>
-                <a:latin typeface="Helvetica Neue"/>
+                <a:latin typeface="Arial"/>
               </a:rPr>
               <a:t>MANI</a:t>
             </a:r>
@@ -18866,7 +18866,7 @@
                 <a:solidFill>
                   <a:srgbClr val="0A0A0A"/>
                 </a:solidFill>
-                <a:latin typeface="Helvetica Neue"/>
+                <a:latin typeface="Arial"/>
               </a:rPr>
               <a:t>FESTO</a:t>
             </a:r>
@@ -18938,7 +18938,7 @@
                 <a:solidFill>
                   <a:srgbClr val="0A0A0A"/>
                 </a:solidFill>
-                <a:latin typeface="Helvetica Neue"/>
+                <a:latin typeface="Arial"/>
               </a:rPr>
               <a:t xml:space="preserve">Four tenets we will not negotiate.
             Pin this above your desk.</a:t>
@@ -19058,7 +19058,7 @@
                 <a:solidFill>
                   <a:srgbClr val="0A0A0A"/>
                 </a:solidFill>
-                <a:latin typeface="Helvetica Neue"/>
+                <a:latin typeface="Arial"/>
               </a:rPr>
               <a:t>01</a:t>
             </a:r>
@@ -19093,7 +19093,7 @@
                 <a:solidFill>
                   <a:srgbClr val="0A0A0A"/>
                 </a:solidFill>
-                <a:latin typeface="Helvetica Neue"/>
+                <a:latin typeface="Arial"/>
               </a:rPr>
               <a:t>EVERY SHAPE IS EDITABLE.</a:t>
             </a:r>
@@ -19128,7 +19128,7 @@
                 <a:solidFill>
                   <a:srgbClr val="0A0A0A"/>
                 </a:solidFill>
-                <a:latin typeface="Helvetica Neue"/>
+                <a:latin typeface="Arial"/>
               </a:rPr>
               <a:t>The PPTX you ship is the artifact someone else will edit. No rasters, no apologies.</a:t>
             </a:r>
@@ -19205,7 +19205,7 @@
                 <a:solidFill>
                   <a:srgbClr val="0A0A0A"/>
                 </a:solidFill>
-                <a:latin typeface="Helvetica Neue"/>
+                <a:latin typeface="Arial"/>
               </a:rPr>
               <a:t>02</a:t>
             </a:r>
@@ -19240,7 +19240,7 @@
                 <a:solidFill>
                   <a:srgbClr val="0A0A0A"/>
                 </a:solidFill>
-                <a:latin typeface="Helvetica Neue"/>
+                <a:latin typeface="Arial"/>
               </a:rPr>
               <a:t>TYPE IS A FIRST-CLASS CITIZEN.</a:t>
             </a:r>
@@ -19275,7 +19275,7 @@
                 <a:solidFill>
                   <a:srgbClr val="0A0A0A"/>
                 </a:solidFill>
-                <a:latin typeface="Helvetica Neue"/>
+                <a:latin typeface="Arial"/>
               </a:rPr>
               <a:t>Glyphs survive the export with their tracking, leading, and weight intact. We do not flatten.</a:t>
             </a:r>
@@ -19352,7 +19352,7 @@
                 <a:solidFill>
                   <a:srgbClr val="0A0A0A"/>
                 </a:solidFill>
-                <a:latin typeface="Helvetica Neue"/>
+                <a:latin typeface="Arial"/>
               </a:rPr>
               <a:t>03</a:t>
             </a:r>
@@ -19387,7 +19387,7 @@
                 <a:solidFill>
                   <a:srgbClr val="0A0A0A"/>
                 </a:solidFill>
-                <a:latin typeface="Helvetica Neue"/>
+                <a:latin typeface="Arial"/>
               </a:rPr>
               <a:t>GRADIENTS ARE NATIVE.</a:t>
             </a:r>
@@ -19422,7 +19422,7 @@
                 <a:solidFill>
                   <a:srgbClr val="0A0A0A"/>
                 </a:solidFill>
-                <a:latin typeface="Helvetica Neue"/>
+                <a:latin typeface="Arial"/>
               </a:rPr>
               <a:t>Linear and radial fills emit as &lt;a:gradFill&gt;. PowerPoint colour-pickers stay accurate.</a:t>
             </a:r>
@@ -19499,7 +19499,7 @@
                 <a:solidFill>
                   <a:srgbClr val="0A0A0A"/>
                 </a:solidFill>
-                <a:latin typeface="Helvetica Neue"/>
+                <a:latin typeface="Arial"/>
               </a:rPr>
               <a:t>04</a:t>
             </a:r>
@@ -19534,7 +19534,7 @@
                 <a:solidFill>
                   <a:srgbClr val="0A0A0A"/>
                 </a:solidFill>
-                <a:latin typeface="Helvetica Neue"/>
+                <a:latin typeface="Arial"/>
               </a:rPr>
               <a:t>LLM-LEGIBLE BY CONSTRUCTION.</a:t>
             </a:r>
@@ -19569,7 +19569,7 @@
                 <a:solidFill>
                   <a:srgbClr val="0A0A0A"/>
                 </a:solidFill>
-                <a:latin typeface="Helvetica Neue"/>
+                <a:latin typeface="Arial"/>
               </a:rPr>
               <a:t>A pre-flight checker tells the model what works before the conversion runs. No surprises.</a:t>
             </a:r>
@@ -19778,7 +19778,7 @@
                 <a:solidFill>
                   <a:srgbClr val="0A0A0A"/>
                 </a:solidFill>
-                <a:latin typeface="Helvetica Neue"/>
+                <a:latin typeface="Arial"/>
               </a:rPr>
               <a:t xml:space="preserve">
           BY THE</a:t>
@@ -19791,7 +19791,7 @@
                 <a:solidFill>
                   <a:srgbClr val="0A0A0A"/>
                 </a:solidFill>
-                <a:latin typeface="Helvetica Neue"/>
+                <a:latin typeface="Arial"/>
               </a:rPr>
               <a:t>NUMBERS</a:t>
             </a:r>
@@ -19926,7 +19926,7 @@
                 <a:solidFill>
                   <a:srgbClr val="0A0A0A"/>
                 </a:solidFill>
-                <a:latin typeface="Helvetica Neue"/>
+                <a:latin typeface="Arial"/>
               </a:rPr>
               <a:t>87</a:t>
             </a:r>
@@ -19935,7 +19935,7 @@
                 <a:solidFill>
                   <a:srgbClr val="0A0A0A"/>
                 </a:solidFill>
-                <a:latin typeface="Helvetica Neue"/>
+                <a:latin typeface="Arial"/>
               </a:rPr>
               <a:t>%</a:t>
             </a:r>
@@ -19970,7 +19970,7 @@
                 <a:solidFill>
                   <a:srgbClr val="0A0A0A"/>
                 </a:solidFill>
-                <a:latin typeface="Helvetica Neue"/>
+                <a:latin typeface="Arial"/>
               </a:rPr>
               <a:t>of slide area emits as editable PPTX primitives.</a:t>
             </a:r>
@@ -20047,7 +20047,7 @@
                 <a:solidFill>
                   <a:srgbClr val="0A0A0A"/>
                 </a:solidFill>
-                <a:latin typeface="Helvetica Neue"/>
+                <a:latin typeface="Arial"/>
               </a:rPr>
               <a:t>0.12</a:t>
             </a:r>
@@ -20056,7 +20056,7 @@
                 <a:solidFill>
                   <a:srgbClr val="0A0A0A"/>
                 </a:solidFill>
-                <a:latin typeface="Helvetica Neue"/>
+                <a:latin typeface="Arial"/>
               </a:rPr>
               <a:t>%</a:t>
             </a:r>
@@ -20091,7 +20091,7 @@
                 <a:solidFill>
                   <a:srgbClr val="0A0A0A"/>
                 </a:solidFill>
-                <a:latin typeface="Helvetica Neue"/>
+                <a:latin typeface="Arial"/>
               </a:rPr>
               <a:t>average drift per slide vs. the source HTML.</a:t>
             </a:r>
@@ -20168,7 +20168,7 @@
                 <a:solidFill>
                   <a:srgbClr val="0A0A0A"/>
                 </a:solidFill>
-                <a:latin typeface="Helvetica Neue"/>
+                <a:latin typeface="Arial"/>
               </a:rPr>
               <a:t>155</a:t>
             </a:r>
@@ -20203,7 +20203,7 @@
                 <a:solidFill>
                   <a:srgbClr val="0A0A0A"/>
                 </a:solidFill>
-                <a:latin typeface="Helvetica Neue"/>
+                <a:latin typeface="Arial"/>
               </a:rPr>
               <a:t>atomic recipes shipped in atoms.yaml.</a:t>
             </a:r>
@@ -20280,7 +20280,7 @@
                 <a:solidFill>
                   <a:srgbClr val="0A0A0A"/>
                 </a:solidFill>
-                <a:latin typeface="Helvetica Neue"/>
+                <a:latin typeface="Arial"/>
               </a:rPr>
               <a:t>28</a:t>
             </a:r>
@@ -20289,7 +20289,7 @@
                 <a:solidFill>
                   <a:srgbClr val="0A0A0A"/>
                 </a:solidFill>
-                <a:latin typeface="Helvetica Neue"/>
+                <a:latin typeface="Arial"/>
               </a:rPr>
               <a:t>s</a:t>
             </a:r>
@@ -20324,7 +20324,7 @@
                 <a:solidFill>
                   <a:srgbClr val="0A0A0A"/>
                 </a:solidFill>
-                <a:latin typeface="Helvetica Neue"/>
+                <a:latin typeface="Arial"/>
               </a:rPr>
               <a:t>median end-to-end conversion for a 12-slide deck.</a:t>
             </a:r>
@@ -24879,7 +24879,7 @@
                 <a:solidFill>
                   <a:srgbClr val="0D1F3C"/>
                 </a:solidFill>
-                <a:latin typeface="Playfair Display"/>
+                <a:latin typeface="Cambria"/>
               </a:rPr>
               <a:t xml:space="preserve">
           The slides we ship are</a:t>
@@ -24892,7 +24892,7 @@
                 <a:solidFill>
                   <a:srgbClr val="FFECC4"/>
                 </a:solidFill>
-                <a:latin typeface="Playfair Display"/>
+                <a:latin typeface="Cambria"/>
               </a:rPr>
               <a:t>an act of editing,</a:t>
             </a:r>
@@ -24904,7 +24904,7 @@
                 <a:solidFill>
                   <a:srgbClr val="0D1F3C"/>
                 </a:solidFill>
-                <a:latin typeface="Playfair Display"/>
+                <a:latin typeface="Cambria"/>
               </a:rPr>
               <a:t xml:space="preserve">
           not an accident</a:t>
@@ -24917,7 +24917,7 @@
                 <a:solidFill>
                   <a:srgbClr val="0D1F3C"/>
                 </a:solidFill>
-                <a:latin typeface="Playfair Display"/>
+                <a:latin typeface="Cambria"/>
               </a:rPr>
               <a:t xml:space="preserve">of capture.
         </a:t>
@@ -25332,7 +25332,7 @@
                 <a:solidFill>
                   <a:srgbClr val="1F2924"/>
                 </a:solidFill>
-                <a:latin typeface="Spectral"/>
+                <a:latin typeface="Cambria"/>
               </a:rPr>
               <a:t>On editing</a:t>
             </a:r>
@@ -25658,7 +25658,7 @@
                 <a:solidFill>
                   <a:srgbClr val="B05A3C"/>
                 </a:solidFill>
-                <a:latin typeface="Inter Tight"/>
+                <a:latin typeface="Calibri"/>
               </a:rPr>
               <a:t>Index — six chapters</a:t>
             </a:r>
@@ -25770,7 +25770,7 @@
                 <a:solidFill>
                   <a:srgbClr val="1F2924"/>
                 </a:solidFill>
-                <a:latin typeface="Spectral"/>
+                <a:latin typeface="Cambria"/>
               </a:rPr>
               <a:t>Removing</a:t>
             </a:r>
@@ -25882,7 +25882,7 @@
                 <a:solidFill>
                   <a:srgbClr val="1F2924"/>
                 </a:solidFill>
-                <a:latin typeface="Spectral"/>
+                <a:latin typeface="Cambria"/>
               </a:rPr>
               <a:t>Subtraction</a:t>
             </a:r>
@@ -25994,7 +25994,7 @@
                 <a:solidFill>
                   <a:srgbClr val="1F2924"/>
                 </a:solidFill>
-                <a:latin typeface="Spectral"/>
+                <a:latin typeface="Cambria"/>
               </a:rPr>
               <a:t>Restraint</a:t>
             </a:r>
@@ -26106,7 +26106,7 @@
                 <a:solidFill>
                   <a:srgbClr val="1F2924"/>
                 </a:solidFill>
-                <a:latin typeface="Spectral"/>
+                <a:latin typeface="Cambria"/>
               </a:rPr>
               <a:t>The discipline</a:t>
             </a:r>
@@ -26218,7 +26218,7 @@
                 <a:solidFill>
                   <a:srgbClr val="1F2924"/>
                 </a:solidFill>
-                <a:latin typeface="Spectral"/>
+                <a:latin typeface="Cambria"/>
               </a:rPr>
               <a:t>Asymmetry</a:t>
             </a:r>
@@ -26330,7 +26330,7 @@
                 <a:solidFill>
                   <a:srgbClr val="1F2924"/>
                 </a:solidFill>
-                <a:latin typeface="Spectral"/>
+                <a:latin typeface="Cambria"/>
               </a:rPr>
               <a:t>Silence</a:t>
             </a:r>
@@ -26532,7 +26532,7 @@
                 <a:solidFill>
                   <a:srgbClr val="1F2924"/>
                 </a:solidFill>
-                <a:latin typeface="Spectral"/>
+                <a:latin typeface="Cambria"/>
               </a:rPr>
               <a:t>vol · iii</a:t>
             </a:r>
@@ -26567,7 +26567,7 @@
                 <a:solidFill>
                   <a:srgbClr val="2D3833"/>
                 </a:solidFill>
-                <a:latin typeface="Spectral"/>
+                <a:latin typeface="Cambria"/>
               </a:rPr>
               <a:t xml:space="preserve">Six chapters on the discipline that
           separates craft from competence — the
@@ -26974,7 +26974,7 @@
                 <a:solidFill>
                   <a:srgbClr val="B05A3C"/>
                 </a:solidFill>
-                <a:latin typeface="Spectral"/>
+                <a:latin typeface="Cambria"/>
               </a:rPr>
               <a:t>T</a:t>
             </a:r>
@@ -27009,7 +27009,7 @@
                 <a:solidFill>
                   <a:srgbClr val="2D3833"/>
                 </a:solidFill>
-                <a:latin typeface="Inter Tight"/>
+                <a:latin typeface="Calibri"/>
               </a:rPr>
               <a:t xml:space="preserve">
           o edit is the most quietly difficult act in any craft.
@@ -27022,7 +27022,7 @@
                 <a:solidFill>
                   <a:srgbClr val="7A8978"/>
                 </a:solidFill>
-                <a:latin typeface="Inter Tight"/>
+                <a:latin typeface="Calibri"/>
               </a:rPr>
               <a:t xml:space="preserve">A page that says less,
           says more.</a:t>
@@ -27032,7 +27032,7 @@
                 <a:solidFill>
                   <a:srgbClr val="2D3833"/>
                 </a:solidFill>
-                <a:latin typeface="Inter Tight"/>
+                <a:latin typeface="Calibri"/>
               </a:rPr>
               <a:t xml:space="preserve">
         </a:t>
@@ -27068,7 +27068,7 @@
                 <a:solidFill>
                   <a:srgbClr val="2D3833"/>
                 </a:solidFill>
-                <a:latin typeface="Inter Tight"/>
+                <a:latin typeface="Calibri"/>
               </a:rPr>
               <a:t xml:space="preserve">The disciplines that hold their composure under reduction
           — typography, music, architecture — are the ones
@@ -34400,7 +34400,7 @@
                 <a:solidFill>
                   <a:srgbClr val="1F2924"/>
                 </a:solidFill>
-                <a:latin typeface="Spectral"/>
+                <a:latin typeface="Cambria"/>
               </a:rPr>
               <a:t xml:space="preserve">The keyboard once required us to commit —
           a struck letter could not be unseen.</a:t>
@@ -34780,7 +34780,7 @@
                 <a:solidFill>
                   <a:srgbClr val="1F2924"/>
                 </a:solidFill>
-                <a:latin typeface="Spectral"/>
+                <a:latin typeface="Cambria"/>
               </a:rPr>
               <a:t xml:space="preserve">We removed forty per cent of the elements.
           Engagement rose by twenty-two.</a:t>
@@ -34860,7 +34860,7 @@
                 <a:solidFill>
                   <a:srgbClr val="2D3833"/>
                 </a:solidFill>
-                <a:latin typeface="Inter Tight"/>
+                <a:latin typeface="Calibri"/>
               </a:rPr>
               <a:t xml:space="preserve">The fewest legible elements that still
           carry the argument. That is the rule.
@@ -35223,7 +35223,7 @@
                 <a:solidFill>
                   <a:srgbClr val="1F2924"/>
                 </a:solidFill>
-                <a:latin typeface="Spectral"/>
+                <a:latin typeface="Cambria"/>
               </a:rPr>
               <a:t>One word, four voices.</a:t>
             </a:r>
@@ -35335,7 +35335,7 @@
                 <a:solidFill>
                   <a:srgbClr val="1F2924"/>
                 </a:solidFill>
-                <a:latin typeface="Spectral"/>
+                <a:latin typeface="Cambria"/>
               </a:rPr>
               <a:t>Restraint</a:t>
             </a:r>
@@ -35491,7 +35491,7 @@
                 <a:solidFill>
                   <a:srgbClr val="1F2924"/>
                 </a:solidFill>
-                <a:latin typeface="Spectral"/>
+                <a:latin typeface="Cambria"/>
               </a:rPr>
               <a:t>Restraint</a:t>
             </a:r>
@@ -35647,7 +35647,7 @@
                 <a:solidFill>
                   <a:srgbClr val="1F2924"/>
                 </a:solidFill>
-                <a:latin typeface="Spectral"/>
+                <a:latin typeface="Cambria"/>
               </a:rPr>
               <a:t>Restraint</a:t>
             </a:r>
@@ -35803,7 +35803,7 @@
                 <a:solidFill>
                   <a:srgbClr val="B05A3C"/>
                 </a:solidFill>
-                <a:latin typeface="Spectral"/>
+                <a:latin typeface="Cambria"/>
               </a:rPr>
               <a:t>Restraint</a:t>
             </a:r>
@@ -35882,7 +35882,7 @@
                 <a:solidFill>
                   <a:srgbClr val="2D3833"/>
                 </a:solidFill>
-                <a:latin typeface="Spectral"/>
+                <a:latin typeface="Cambria"/>
               </a:rPr>
               <a:t xml:space="preserve">Each axis carries a different register — weight is emphasis,
         italic is voice, family is genre. Three voices, used surgically.</a:t>
@@ -36229,7 +36229,7 @@
                 <a:solidFill>
                   <a:srgbClr val="1F2924"/>
                 </a:solidFill>
-                <a:latin typeface="Spectral"/>
+                <a:latin typeface="Cambria"/>
               </a:rPr>
               <a:t xml:space="preserve">
         To remove a thing</a:t>
@@ -36242,7 +36242,7 @@
                 <a:solidFill>
                   <a:srgbClr val="1F2924"/>
                 </a:solidFill>
-                <a:latin typeface="Spectral"/>
+                <a:latin typeface="Cambria"/>
               </a:rPr>
               <a:t xml:space="preserve">
         is to say what mattered.
@@ -46500,7 +46500,7 @@
                 <a:solidFill>
                   <a:srgbClr val="EFE9DC"/>
                 </a:solidFill>
-                <a:latin typeface="Spectral"/>
+                <a:latin typeface="Cambria"/>
               </a:rPr>
               <a:t xml:space="preserve">Where the eye chooses to rest is
           where the page chooses to live.</a:t>
@@ -46880,7 +46880,7 @@
                 <a:solidFill>
                   <a:srgbClr val="1F2924"/>
                 </a:solidFill>
-                <a:latin typeface="Spectral"/>
+                <a:latin typeface="Cambria"/>
               </a:rPr>
               <a:t>A working method, in six small acts.</a:t>
             </a:r>
@@ -47160,7 +47160,7 @@
                 <a:solidFill>
                   <a:srgbClr val="1F2924"/>
                 </a:solidFill>
-                <a:latin typeface="Spectral"/>
+                <a:latin typeface="Cambria"/>
               </a:rPr>
               <a:t>Begin generously</a:t>
             </a:r>
@@ -47195,7 +47195,7 @@
                 <a:solidFill>
                   <a:srgbClr val="2D3833"/>
                 </a:solidFill>
-                <a:latin typeface="Inter Tight"/>
+                <a:latin typeface="Calibri"/>
               </a:rPr>
               <a:t>Write the loud first draft. Do not edit while writing.</a:t>
             </a:r>
@@ -47450,7 +47450,7 @@
                 <a:solidFill>
                   <a:srgbClr val="1F2924"/>
                 </a:solidFill>
-                <a:latin typeface="Spectral"/>
+                <a:latin typeface="Cambria"/>
               </a:rPr>
               <a:t>Read it slowly</a:t>
             </a:r>
@@ -47485,7 +47485,7 @@
                 <a:solidFill>
                   <a:srgbClr val="2D3833"/>
                 </a:solidFill>
-                <a:latin typeface="Inter Tight"/>
+                <a:latin typeface="Calibri"/>
               </a:rPr>
               <a:t>A page reread is a page rewritten in your head.</a:t>
             </a:r>
@@ -47813,7 +47813,7 @@
                 <a:solidFill>
                   <a:srgbClr val="1F2924"/>
                 </a:solidFill>
-                <a:latin typeface="Spectral"/>
+                <a:latin typeface="Cambria"/>
               </a:rPr>
               <a:t>Cut what is true but unnecessary</a:t>
             </a:r>
@@ -47848,7 +47848,7 @@
                 <a:solidFill>
                   <a:srgbClr val="2D3833"/>
                 </a:solidFill>
-                <a:latin typeface="Inter Tight"/>
+                <a:latin typeface="Calibri"/>
               </a:rPr>
               <a:t>The hardest line to remove is the one you wrote well.</a:t>
             </a:r>
@@ -48018,7 +48018,7 @@
                 <a:solidFill>
                   <a:srgbClr val="1F2924"/>
                 </a:solidFill>
-                <a:latin typeface="Spectral"/>
+                <a:latin typeface="Cambria"/>
               </a:rPr>
               <a:t>Subtract the support</a:t>
             </a:r>
@@ -48053,7 +48053,7 @@
                 <a:solidFill>
                   <a:srgbClr val="2D3833"/>
                 </a:solidFill>
-                <a:latin typeface="Inter Tight"/>
+                <a:latin typeface="Calibri"/>
               </a:rPr>
               <a:t>Decoration is the first to go. Hierarchy survives without it.</a:t>
             </a:r>
@@ -48300,7 +48300,7 @@
                 <a:solidFill>
                   <a:srgbClr val="1F2924"/>
                 </a:solidFill>
-                <a:latin typeface="Spectral"/>
+                <a:latin typeface="Cambria"/>
               </a:rPr>
               <a:t>Re-anchor the argument</a:t>
             </a:r>
@@ -48335,7 +48335,7 @@
                 <a:solidFill>
                   <a:srgbClr val="2D3833"/>
                 </a:solidFill>
-                <a:latin typeface="Inter Tight"/>
+                <a:latin typeface="Calibri"/>
               </a:rPr>
               <a:t>What is the page about? Move that to the centre.</a:t>
             </a:r>
@@ -48531,7 +48531,7 @@
                 <a:solidFill>
                   <a:srgbClr val="1F2924"/>
                 </a:solidFill>
-                <a:latin typeface="Spectral"/>
+                <a:latin typeface="Cambria"/>
               </a:rPr>
               <a:t>Stop early</a:t>
             </a:r>
@@ -48566,7 +48566,7 @@
                 <a:solidFill>
                   <a:srgbClr val="2D3833"/>
                 </a:solidFill>
-                <a:latin typeface="Inter Tight"/>
+                <a:latin typeface="Calibri"/>
               </a:rPr>
               <a:t>The last cut should leave the page slightly underdressed.</a:t>
             </a:r>
@@ -48971,7 +48971,7 @@
                 <a:solidFill>
                   <a:srgbClr val="2D3833"/>
                 </a:solidFill>
-                <a:latin typeface="Spectral"/>
+                <a:latin typeface="Cambria"/>
               </a:rPr>
               <a:t xml:space="preserve">The conversion drift across one thousand
           two hundred eighty-four decks.</a:t>
@@ -49274,7 +49274,7 @@
                 <a:solidFill>
                   <a:srgbClr val="1F2924"/>
                 </a:solidFill>
-                <a:latin typeface="Spectral"/>
+                <a:latin typeface="Cambria"/>
               </a:rPr>
               <a:t>The volume in six figures.</a:t>
             </a:r>
@@ -50570,7 +50570,7 @@
                 <a:solidFill>
                   <a:srgbClr val="B05A3C"/>
                 </a:solidFill>
-                <a:latin typeface="Spectral"/>
+                <a:latin typeface="Cambria"/>
               </a:rPr>
               <a:t>—</a:t>
             </a:r>
@@ -50605,7 +50605,7 @@
                 <a:solidFill>
                   <a:srgbClr val="2D3833"/>
                 </a:solidFill>
-                <a:latin typeface="Spectral"/>
+                <a:latin typeface="Cambria"/>
               </a:rPr>
               <a:t xml:space="preserve">
           The last cut is the page that</a:t>
@@ -50618,7 +50618,7 @@
                 <a:solidFill>
                   <a:srgbClr val="2D3833"/>
                 </a:solidFill>
-                <a:latin typeface="Spectral"/>
+                <a:latin typeface="Cambria"/>
               </a:rPr>
               <a:t xml:space="preserve">says only what it must.
         </a:t>
@@ -55340,7 +55340,7 @@
                 <a:solidFill>
                   <a:srgbClr val="F5F5F7"/>
                 </a:solidFill>
-                <a:latin typeface="Tiempos"/>
+                <a:latin typeface="Cambria"/>
               </a:rPr>
               <a:t xml:space="preserve">Slidify is the first tool that actually understands what designers
         mean by “editable.”</a:t>

--- a/_bench/dist/bench-combined.pptx
+++ b/_bench/dist/bench-combined.pptx
@@ -17931,6 +17931,17 @@
           <a:prstGeom prst="ellipse">
             <a:avLst/>
           </a:prstGeom>
+          <a:gradFill flip="none" rotWithShape="1">
+            <a:gsLst>
+              <a:gs pos="0">
+                <a:srgbClr val="7A2C30"/>
+              </a:gs>
+              <a:gs pos="100000">
+                <a:srgbClr val="0A0A0A"/>
+              </a:gs>
+            </a:gsLst>
+            <a:lin ang="4398045" scaled="1"/>
+          </a:gradFill>
           <a:ln>
             <a:noFill/>
           </a:ln>
@@ -18000,6 +18011,17 @@
               </a:path>
             </a:pathLst>
           </a:custGeom>
+          <a:gradFill flip="none" rotWithShape="1">
+            <a:gsLst>
+              <a:gs pos="0">
+                <a:srgbClr val="7A2C30"/>
+              </a:gs>
+              <a:gs pos="100000">
+                <a:srgbClr val="0A0A0A"/>
+              </a:gs>
+            </a:gsLst>
+            <a:lin ang="4398045" scaled="1"/>
+          </a:gradFill>
           <a:ln>
             <a:noFill/>
           </a:ln>
@@ -24023,6 +24045,23 @@
           <a:prstGeom prst="rect">
             <a:avLst/>
           </a:prstGeom>
+          <a:gradFill flip="none" rotWithShape="1">
+            <a:gsLst>
+              <a:gs pos="0">
+                <a:srgbClr val="FFD9A0"/>
+              </a:gs>
+              <a:gs pos="35000">
+                <a:srgbClr val="FFB886"/>
+              </a:gs>
+              <a:gs pos="80000">
+                <a:srgbClr val="7A6285"/>
+              </a:gs>
+              <a:gs pos="100000">
+                <a:srgbClr val="1A2440"/>
+              </a:gs>
+            </a:gsLst>
+            <a:lin ang="5400000" scaled="1"/>
+          </a:gradFill>
           <a:ln>
             <a:noFill/>
           </a:ln>
@@ -24108,6 +24147,17 @@
           <a:prstGeom prst="rect">
             <a:avLst/>
           </a:prstGeom>
+          <a:gradFill flip="none" rotWithShape="1">
+            <a:gsLst>
+              <a:gs pos="0">
+                <a:srgbClr val="0D1F3C"/>
+              </a:gs>
+              <a:gs pos="100000">
+                <a:srgbClr val="050B1C"/>
+              </a:gs>
+            </a:gsLst>
+            <a:lin ang="5400000" scaled="1"/>
+          </a:gradFill>
           <a:ln>
             <a:noFill/>
           </a:ln>
@@ -24149,6 +24199,28 @@
           <a:prstGeom prst="rect">
             <a:avLst/>
           </a:prstGeom>
+          <a:gradFill flip="none" rotWithShape="1">
+            <a:gsLst>
+              <a:gs pos="0">
+                <a:srgbClr val="FFECC4">
+                  <a:alpha val="95000"/>
+                </a:srgbClr>
+              </a:gs>
+              <a:gs pos="35000">
+                <a:srgbClr val="FF7A59">
+                  <a:alpha val="55000"/>
+                </a:srgbClr>
+              </a:gs>
+              <a:gs pos="100000">
+                <a:srgbClr val="FF7A59">
+                  <a:alpha val="0"/>
+                </a:srgbClr>
+              </a:gs>
+            </a:gsLst>
+            <a:path path="circle">
+              <a:fillToRect l="66000" t="62000" r="34000" b="38000"/>
+            </a:path>
+          </a:gradFill>
           <a:ln>
             <a:noFill/>
           </a:ln>
@@ -24451,6 +24523,21 @@
           <a:prstGeom prst="ellipse">
             <a:avLst/>
           </a:prstGeom>
+          <a:gradFill flip="none" rotWithShape="1">
+            <a:gsLst>
+              <a:gs pos="0">
+                <a:srgbClr val="FFECC4">
+                  <a:alpha val="55000"/>
+                </a:srgbClr>
+              </a:gs>
+              <a:gs pos="100000">
+                <a:srgbClr val="FF7A59">
+                  <a:alpha val="0"/>
+                </a:srgbClr>
+              </a:gs>
+            </a:gsLst>
+            <a:lin ang="5400000" scaled="1"/>
+          </a:gradFill>
           <a:ln>
             <a:noFill/>
           </a:ln>
@@ -24525,6 +24612,20 @@
               </a:path>
             </a:pathLst>
           </a:custGeom>
+          <a:gradFill flip="none" rotWithShape="1">
+            <a:gsLst>
+              <a:gs pos="0">
+                <a:srgbClr val="1A2440"/>
+              </a:gs>
+              <a:gs pos="60000">
+                <a:srgbClr val="0A1124"/>
+              </a:gs>
+              <a:gs pos="100000">
+                <a:srgbClr val="04060F"/>
+              </a:gs>
+            </a:gsLst>
+            <a:lin ang="4721404" scaled="1"/>
+          </a:gradFill>
           <a:ln>
             <a:noFill/>
           </a:ln>
@@ -24566,6 +24667,20 @@
           <a:prstGeom prst="ellipse">
             <a:avLst/>
           </a:prstGeom>
+          <a:gradFill flip="none" rotWithShape="1">
+            <a:gsLst>
+              <a:gs pos="0">
+                <a:srgbClr val="1A2440"/>
+              </a:gs>
+              <a:gs pos="60000">
+                <a:srgbClr val="0A1124"/>
+              </a:gs>
+              <a:gs pos="100000">
+                <a:srgbClr val="04060F"/>
+              </a:gs>
+            </a:gsLst>
+            <a:lin ang="4721404" scaled="1"/>
+          </a:gradFill>
           <a:ln>
             <a:noFill/>
           </a:ln>
@@ -27259,6 +27374,20 @@
           <a:prstGeom prst="rect">
             <a:avLst/>
           </a:prstGeom>
+          <a:gradFill flip="none" rotWithShape="1">
+            <a:gsLst>
+              <a:gs pos="0">
+                <a:srgbClr val="0F1311"/>
+              </a:gs>
+              <a:gs pos="55000">
+                <a:srgbClr val="1F2924"/>
+              </a:gs>
+              <a:gs pos="100000">
+                <a:srgbClr val="8A4530"/>
+              </a:gs>
+            </a:gsLst>
+            <a:lin ang="2700000" scaled="1"/>
+          </a:gradFill>
           <a:ln>
             <a:noFill/>
           </a:ln>
@@ -27300,6 +27429,23 @@
           <a:prstGeom prst="rect">
             <a:avLst/>
           </a:prstGeom>
+          <a:gradFill flip="none" rotWithShape="1">
+            <a:gsLst>
+              <a:gs pos="0">
+                <a:srgbClr val="B05A3C">
+                  <a:alpha val="55000"/>
+                </a:srgbClr>
+              </a:gs>
+              <a:gs pos="60000">
+                <a:srgbClr val="B05A3C">
+                  <a:alpha val="0"/>
+                </a:srgbClr>
+              </a:gs>
+            </a:gsLst>
+            <a:path path="circle">
+              <a:fillToRect l="85000" t="95000" r="15000" b="5000"/>
+            </a:path>
+          </a:gradFill>
           <a:ln>
             <a:noFill/>
           </a:ln>
@@ -27341,6 +27487,23 @@
           <a:prstGeom prst="rect">
             <a:avLst/>
           </a:prstGeom>
+          <a:gradFill flip="none" rotWithShape="1">
+            <a:gsLst>
+              <a:gs pos="0">
+                <a:srgbClr val="C7C0AE">
+                  <a:alpha val="30000"/>
+                </a:srgbClr>
+              </a:gs>
+              <a:gs pos="60000">
+                <a:srgbClr val="C7C0AE">
+                  <a:alpha val="0"/>
+                </a:srgbClr>
+              </a:gs>
+            </a:gsLst>
+            <a:path path="circle">
+              <a:fillToRect l="10000" t="5000" r="90000" b="95000"/>
+            </a:path>
+          </a:gradFill>
           <a:ln>
             <a:noFill/>
           </a:ln>
@@ -28658,6 +28821,17 @@
           <a:prstGeom prst="rect">
             <a:avLst/>
           </a:prstGeom>
+          <a:gradFill flip="none" rotWithShape="1">
+            <a:gsLst>
+              <a:gs pos="0">
+                <a:srgbClr val="EFE9DC"/>
+              </a:gs>
+              <a:gs pos="100000">
+                <a:srgbClr val="C7C0AE"/>
+              </a:gs>
+            </a:gsLst>
+            <a:lin ang="5400000" scaled="1"/>
+          </a:gradFill>
           <a:ln>
             <a:noFill/>
           </a:ln>
@@ -28905,6 +29079,17 @@
               </a:path>
             </a:pathLst>
           </a:custGeom>
+          <a:gradFill flip="none" rotWithShape="1">
+            <a:gsLst>
+              <a:gs pos="0">
+                <a:srgbClr val="B05A3C"/>
+              </a:gs>
+              <a:gs pos="100000">
+                <a:srgbClr val="8A4530"/>
+              </a:gs>
+            </a:gsLst>
+            <a:lin ang="2700000" scaled="1"/>
+          </a:gradFill>
           <a:ln>
             <a:noFill/>
           </a:ln>
@@ -37516,6 +37701,20 @@
           <a:prstGeom prst="rect">
             <a:avLst/>
           </a:prstGeom>
+          <a:gradFill flip="none" rotWithShape="1">
+            <a:gsLst>
+              <a:gs pos="0">
+                <a:srgbClr val="2D3833"/>
+              </a:gs>
+              <a:gs pos="55000">
+                <a:srgbClr val="0F1311"/>
+              </a:gs>
+              <a:gs pos="100000">
+                <a:srgbClr val="8A4530"/>
+              </a:gs>
+            </a:gsLst>
+            <a:lin ang="2700000" scaled="1"/>
+          </a:gradFill>
           <a:ln>
             <a:noFill/>
           </a:ln>
@@ -37557,6 +37756,23 @@
           <a:prstGeom prst="rect">
             <a:avLst/>
           </a:prstGeom>
+          <a:gradFill flip="none" rotWithShape="1">
+            <a:gsLst>
+              <a:gs pos="0">
+                <a:srgbClr val="C7C0AE">
+                  <a:alpha val="30000"/>
+                </a:srgbClr>
+              </a:gs>
+              <a:gs pos="60000">
+                <a:srgbClr val="C7C0AE">
+                  <a:alpha val="0"/>
+                </a:srgbClr>
+              </a:gs>
+            </a:gsLst>
+            <a:path path="circle">
+              <a:fillToRect l="32000" t="40000" r="68000" b="60000"/>
+            </a:path>
+          </a:gradFill>
           <a:ln>
             <a:noFill/>
           </a:ln>
@@ -37642,6 +37858,17 @@
           <a:prstGeom prst="rect">
             <a:avLst/>
           </a:prstGeom>
+          <a:gradFill flip="none" rotWithShape="1">
+            <a:gsLst>
+              <a:gs pos="0">
+                <a:srgbClr val="EFE9DC"/>
+              </a:gs>
+              <a:gs pos="100000">
+                <a:srgbClr val="C7C0AE"/>
+              </a:gs>
+            </a:gsLst>
+            <a:lin ang="5400000" scaled="1"/>
+          </a:gradFill>
           <a:ln>
             <a:noFill/>
           </a:ln>
@@ -38237,6 +38464,20 @@
               </a:path>
             </a:pathLst>
           </a:custGeom>
+          <a:gradFill flip="none" rotWithShape="1">
+            <a:gsLst>
+              <a:gs pos="0">
+                <a:srgbClr val="EFE9DC"/>
+              </a:gs>
+              <a:gs pos="55000">
+                <a:srgbClr val="C7C0AE"/>
+              </a:gs>
+              <a:gs pos="100000">
+                <a:srgbClr val="7A8978"/>
+              </a:gs>
+            </a:gsLst>
+            <a:lin ang="5400000" scaled="1"/>
+          </a:gradFill>
           <a:ln>
             <a:noFill/>
           </a:ln>
@@ -38278,6 +38519,17 @@
           <a:prstGeom prst="ellipse">
             <a:avLst/>
           </a:prstGeom>
+          <a:gradFill flip="none" rotWithShape="1">
+            <a:gsLst>
+              <a:gs pos="0">
+                <a:srgbClr val="0F1311"/>
+              </a:gs>
+              <a:gs pos="100000">
+                <a:srgbClr val="1F2924"/>
+              </a:gs>
+            </a:gsLst>
+            <a:lin ang="5400000" scaled="1"/>
+          </a:gradFill>
           <a:ln>
             <a:noFill/>
           </a:ln>
